--- a/cursos/recursos/aperturas-y-defensas/01-apertura-espanola.pptx
+++ b/cursos/recursos/aperturas-y-defensas/01-apertura-espanola.pptx
@@ -1602,7 +1602,7 @@
                 <a:ea typeface="Calibri" pitchFamily="34" charset="-122"/>
                 <a:cs typeface="Calibri" pitchFamily="34" charset="-120"/>
               </a:rPr>
-              <a:t>1.e4 e5 2.Nf3 Nc6 3.Bb5 clava (indirectamente) al caballo c6 contra el rey y prepara enrocar rápido.</a:t>
+              <a:t>1.e4 e5 2.Cf3 Cc6 3.Ab5 clava (indirectamente) al caballo c6 contra el rey y prepara enrocar rápido.</a:t>
             </a:r>
             <a:endParaRPr lang="en-US" sz="1600" dirty="0"/>
           </a:p>
